--- a/tests/testdata/excel/PowerPoint/形式/大文字拡張子.PPTX
+++ b/tests/testdata/excel/PowerPoint/形式/大文字拡張子.PPTX
@@ -129,7 +129,7 @@
           <p:cNvPr id="2" name="タイトル 1">
             <a:extLst>
               <a:ext uri="{FF2B5EF4-FFF2-40B4-BE49-F238E27FC236}">
-                <a16:creationId xmlns:a16="http://schemas.microsoft.com/office/drawing/2014/main" id="{90D89715-B1DF-8AF0-AAEF-3022072FF54C}"/>
+                <a16:creationId xmlns:a16="http://schemas.microsoft.com/office/drawing/2014/main" id="{F7A69744-FD57-50D8-974E-2A3DF259B067}"/>
               </a:ext>
             </a:extLst>
           </p:cNvPr>
@@ -166,7 +166,7 @@
           <p:cNvPr id="3" name="字幕 2">
             <a:extLst>
               <a:ext uri="{FF2B5EF4-FFF2-40B4-BE49-F238E27FC236}">
-                <a16:creationId xmlns:a16="http://schemas.microsoft.com/office/drawing/2014/main" id="{B742EE1E-BCF9-6EB3-664C-838C8677526A}"/>
+                <a16:creationId xmlns:a16="http://schemas.microsoft.com/office/drawing/2014/main" id="{4E33B6CE-F0F9-07AB-59BC-8D02C326972F}"/>
               </a:ext>
             </a:extLst>
           </p:cNvPr>
@@ -236,7 +236,7 @@
           <p:cNvPr id="4" name="日付プレースホルダー 3">
             <a:extLst>
               <a:ext uri="{FF2B5EF4-FFF2-40B4-BE49-F238E27FC236}">
-                <a16:creationId xmlns:a16="http://schemas.microsoft.com/office/drawing/2014/main" id="{DDC566EE-9D52-8DCF-25B8-06F52DC5BBA4}"/>
+                <a16:creationId xmlns:a16="http://schemas.microsoft.com/office/drawing/2014/main" id="{7C4F923C-C876-9368-FBDD-87181228E624}"/>
               </a:ext>
             </a:extLst>
           </p:cNvPr>
@@ -252,7 +252,7 @@
           <a:bodyPr/>
           <a:lstStyle/>
           <a:p>
-            <a:fld id="{2A58C945-CE02-4F83-A6D0-167C8BCBE6BC}" type="datetimeFigureOut">
+            <a:fld id="{9B8BCB21-04C2-4D3E-9603-2741310A4412}" type="datetimeFigureOut">
               <a:rPr kumimoji="1" lang="ja-JP" altLang="en-US" smtClean="0"/>
               <a:t>2026/9/20</a:t>
             </a:fld>
@@ -265,7 +265,7 @@
           <p:cNvPr id="5" name="フッター プレースホルダー 4">
             <a:extLst>
               <a:ext uri="{FF2B5EF4-FFF2-40B4-BE49-F238E27FC236}">
-                <a16:creationId xmlns:a16="http://schemas.microsoft.com/office/drawing/2014/main" id="{63AE498E-87A6-EAE4-D9CB-255F09635E7F}"/>
+                <a16:creationId xmlns:a16="http://schemas.microsoft.com/office/drawing/2014/main" id="{F1E0CACE-D664-684A-47C0-8EA994A401EA}"/>
               </a:ext>
             </a:extLst>
           </p:cNvPr>
@@ -290,7 +290,7 @@
           <p:cNvPr id="6" name="スライド番号プレースホルダー 5">
             <a:extLst>
               <a:ext uri="{FF2B5EF4-FFF2-40B4-BE49-F238E27FC236}">
-                <a16:creationId xmlns:a16="http://schemas.microsoft.com/office/drawing/2014/main" id="{6FF28E8E-1368-E8C1-A061-737149452B93}"/>
+                <a16:creationId xmlns:a16="http://schemas.microsoft.com/office/drawing/2014/main" id="{1C3022E2-0537-5DBC-70D1-EA033E835F3B}"/>
               </a:ext>
             </a:extLst>
           </p:cNvPr>
@@ -306,7 +306,7 @@
           <a:bodyPr/>
           <a:lstStyle/>
           <a:p>
-            <a:fld id="{18992577-D21F-4C21-AD58-BA56B223B010}" type="slidenum">
+            <a:fld id="{789A5AE6-38FD-4285-82C1-7D570708A39C}" type="slidenum">
               <a:rPr kumimoji="1" lang="ja-JP" altLang="en-US" smtClean="0"/>
               <a:t>‹#›</a:t>
             </a:fld>
@@ -317,7 +317,7 @@
     </p:spTree>
     <p:extLst>
       <p:ext uri="{BB962C8B-B14F-4D97-AF65-F5344CB8AC3E}">
-        <p14:creationId xmlns:p14="http://schemas.microsoft.com/office/powerpoint/2010/main" val="3513377922"/>
+        <p14:creationId xmlns:p14="http://schemas.microsoft.com/office/powerpoint/2010/main" val="1474067875"/>
       </p:ext>
     </p:extLst>
   </p:cSld>
@@ -349,7 +349,7 @@
           <p:cNvPr id="2" name="タイトル 1">
             <a:extLst>
               <a:ext uri="{FF2B5EF4-FFF2-40B4-BE49-F238E27FC236}">
-                <a16:creationId xmlns:a16="http://schemas.microsoft.com/office/drawing/2014/main" id="{319E5A88-8BF8-0B4C-A4FD-093B6E040C2D}"/>
+                <a16:creationId xmlns:a16="http://schemas.microsoft.com/office/drawing/2014/main" id="{42C4659F-C990-3C92-1E78-EB22AFF5A742}"/>
               </a:ext>
             </a:extLst>
           </p:cNvPr>
@@ -377,7 +377,7 @@
           <p:cNvPr id="3" name="縦書きテキスト プレースホルダー 2">
             <a:extLst>
               <a:ext uri="{FF2B5EF4-FFF2-40B4-BE49-F238E27FC236}">
-                <a16:creationId xmlns:a16="http://schemas.microsoft.com/office/drawing/2014/main" id="{6C53CD6C-ED71-C329-8506-F5BE0CAA0300}"/>
+                <a16:creationId xmlns:a16="http://schemas.microsoft.com/office/drawing/2014/main" id="{784B368B-9845-5688-A536-FF9CC8FAC381}"/>
               </a:ext>
             </a:extLst>
           </p:cNvPr>
@@ -466,7 +466,7 @@
           <p:cNvPr id="4" name="日付プレースホルダー 3">
             <a:extLst>
               <a:ext uri="{FF2B5EF4-FFF2-40B4-BE49-F238E27FC236}">
-                <a16:creationId xmlns:a16="http://schemas.microsoft.com/office/drawing/2014/main" id="{D48ABEAF-E880-D536-80E9-0981177599E1}"/>
+                <a16:creationId xmlns:a16="http://schemas.microsoft.com/office/drawing/2014/main" id="{57FF96FB-6014-7603-7689-A97C15159086}"/>
               </a:ext>
             </a:extLst>
           </p:cNvPr>
@@ -482,7 +482,7 @@
           <a:bodyPr/>
           <a:lstStyle/>
           <a:p>
-            <a:fld id="{2A58C945-CE02-4F83-A6D0-167C8BCBE6BC}" type="datetimeFigureOut">
+            <a:fld id="{9B8BCB21-04C2-4D3E-9603-2741310A4412}" type="datetimeFigureOut">
               <a:rPr kumimoji="1" lang="ja-JP" altLang="en-US" smtClean="0"/>
               <a:t>2026/9/20</a:t>
             </a:fld>
@@ -495,7 +495,7 @@
           <p:cNvPr id="5" name="フッター プレースホルダー 4">
             <a:extLst>
               <a:ext uri="{FF2B5EF4-FFF2-40B4-BE49-F238E27FC236}">
-                <a16:creationId xmlns:a16="http://schemas.microsoft.com/office/drawing/2014/main" id="{E842984B-D2C2-0C89-5094-AEE2EFF76AEC}"/>
+                <a16:creationId xmlns:a16="http://schemas.microsoft.com/office/drawing/2014/main" id="{2EFE0438-5C78-EA19-FB18-28F9DFEACE1B}"/>
               </a:ext>
             </a:extLst>
           </p:cNvPr>
@@ -520,7 +520,7 @@
           <p:cNvPr id="6" name="スライド番号プレースホルダー 5">
             <a:extLst>
               <a:ext uri="{FF2B5EF4-FFF2-40B4-BE49-F238E27FC236}">
-                <a16:creationId xmlns:a16="http://schemas.microsoft.com/office/drawing/2014/main" id="{71EA2496-B64A-F56B-FAFF-A87198EDAA70}"/>
+                <a16:creationId xmlns:a16="http://schemas.microsoft.com/office/drawing/2014/main" id="{815603C6-2331-BEB8-2951-6B93F29636EF}"/>
               </a:ext>
             </a:extLst>
           </p:cNvPr>
@@ -536,7 +536,7 @@
           <a:bodyPr/>
           <a:lstStyle/>
           <a:p>
-            <a:fld id="{18992577-D21F-4C21-AD58-BA56B223B010}" type="slidenum">
+            <a:fld id="{789A5AE6-38FD-4285-82C1-7D570708A39C}" type="slidenum">
               <a:rPr kumimoji="1" lang="ja-JP" altLang="en-US" smtClean="0"/>
               <a:t>‹#›</a:t>
             </a:fld>
@@ -547,7 +547,7 @@
     </p:spTree>
     <p:extLst>
       <p:ext uri="{BB962C8B-B14F-4D97-AF65-F5344CB8AC3E}">
-        <p14:creationId xmlns:p14="http://schemas.microsoft.com/office/powerpoint/2010/main" val="3237571554"/>
+        <p14:creationId xmlns:p14="http://schemas.microsoft.com/office/powerpoint/2010/main" val="4206828058"/>
       </p:ext>
     </p:extLst>
   </p:cSld>
@@ -579,7 +579,7 @@
           <p:cNvPr id="2" name="縦書きタイトル 1">
             <a:extLst>
               <a:ext uri="{FF2B5EF4-FFF2-40B4-BE49-F238E27FC236}">
-                <a16:creationId xmlns:a16="http://schemas.microsoft.com/office/drawing/2014/main" id="{0A8C606E-2E7C-FE4E-50DD-6690BD319061}"/>
+                <a16:creationId xmlns:a16="http://schemas.microsoft.com/office/drawing/2014/main" id="{0F1BC6BF-CE7A-F1BF-ABDD-0F04A7F12B41}"/>
               </a:ext>
             </a:extLst>
           </p:cNvPr>
@@ -612,7 +612,7 @@
           <p:cNvPr id="3" name="縦書きテキスト プレースホルダー 2">
             <a:extLst>
               <a:ext uri="{FF2B5EF4-FFF2-40B4-BE49-F238E27FC236}">
-                <a16:creationId xmlns:a16="http://schemas.microsoft.com/office/drawing/2014/main" id="{8EA87565-29D5-9D2E-4276-8C1EEC2548A3}"/>
+                <a16:creationId xmlns:a16="http://schemas.microsoft.com/office/drawing/2014/main" id="{6BFE18B6-FDEC-C09C-6C43-508A62BE93E0}"/>
               </a:ext>
             </a:extLst>
           </p:cNvPr>
@@ -706,7 +706,7 @@
           <p:cNvPr id="4" name="日付プレースホルダー 3">
             <a:extLst>
               <a:ext uri="{FF2B5EF4-FFF2-40B4-BE49-F238E27FC236}">
-                <a16:creationId xmlns:a16="http://schemas.microsoft.com/office/drawing/2014/main" id="{98FA484F-DB8E-B8D4-9763-1D068EDA494F}"/>
+                <a16:creationId xmlns:a16="http://schemas.microsoft.com/office/drawing/2014/main" id="{31FECB45-B5C7-8D5D-A527-BE77C93D0089}"/>
               </a:ext>
             </a:extLst>
           </p:cNvPr>
@@ -722,7 +722,7 @@
           <a:bodyPr/>
           <a:lstStyle/>
           <a:p>
-            <a:fld id="{2A58C945-CE02-4F83-A6D0-167C8BCBE6BC}" type="datetimeFigureOut">
+            <a:fld id="{9B8BCB21-04C2-4D3E-9603-2741310A4412}" type="datetimeFigureOut">
               <a:rPr kumimoji="1" lang="ja-JP" altLang="en-US" smtClean="0"/>
               <a:t>2026/9/20</a:t>
             </a:fld>
@@ -735,7 +735,7 @@
           <p:cNvPr id="5" name="フッター プレースホルダー 4">
             <a:extLst>
               <a:ext uri="{FF2B5EF4-FFF2-40B4-BE49-F238E27FC236}">
-                <a16:creationId xmlns:a16="http://schemas.microsoft.com/office/drawing/2014/main" id="{5646C080-1A2C-C891-D62A-B7F422FFBF9D}"/>
+                <a16:creationId xmlns:a16="http://schemas.microsoft.com/office/drawing/2014/main" id="{4E826510-8AEA-F3C2-263E-82FE78E41BD1}"/>
               </a:ext>
             </a:extLst>
           </p:cNvPr>
@@ -760,7 +760,7 @@
           <p:cNvPr id="6" name="スライド番号プレースホルダー 5">
             <a:extLst>
               <a:ext uri="{FF2B5EF4-FFF2-40B4-BE49-F238E27FC236}">
-                <a16:creationId xmlns:a16="http://schemas.microsoft.com/office/drawing/2014/main" id="{B80DE1B4-A119-D875-FDAF-1A2DBC162E6A}"/>
+                <a16:creationId xmlns:a16="http://schemas.microsoft.com/office/drawing/2014/main" id="{700D5620-D4B4-CD67-F41D-B2FE6A839384}"/>
               </a:ext>
             </a:extLst>
           </p:cNvPr>
@@ -776,7 +776,7 @@
           <a:bodyPr/>
           <a:lstStyle/>
           <a:p>
-            <a:fld id="{18992577-D21F-4C21-AD58-BA56B223B010}" type="slidenum">
+            <a:fld id="{789A5AE6-38FD-4285-82C1-7D570708A39C}" type="slidenum">
               <a:rPr kumimoji="1" lang="ja-JP" altLang="en-US" smtClean="0"/>
               <a:t>‹#›</a:t>
             </a:fld>
@@ -787,7 +787,7 @@
     </p:spTree>
     <p:extLst>
       <p:ext uri="{BB962C8B-B14F-4D97-AF65-F5344CB8AC3E}">
-        <p14:creationId xmlns:p14="http://schemas.microsoft.com/office/powerpoint/2010/main" val="3944765607"/>
+        <p14:creationId xmlns:p14="http://schemas.microsoft.com/office/powerpoint/2010/main" val="4095842289"/>
       </p:ext>
     </p:extLst>
   </p:cSld>
@@ -819,7 +819,7 @@
           <p:cNvPr id="2" name="タイトル 1">
             <a:extLst>
               <a:ext uri="{FF2B5EF4-FFF2-40B4-BE49-F238E27FC236}">
-                <a16:creationId xmlns:a16="http://schemas.microsoft.com/office/drawing/2014/main" id="{3DFDFBF9-7149-195B-FF5C-371946D76224}"/>
+                <a16:creationId xmlns:a16="http://schemas.microsoft.com/office/drawing/2014/main" id="{7569C416-943D-370B-8A64-8AE4FBF274EE}"/>
               </a:ext>
             </a:extLst>
           </p:cNvPr>
@@ -847,7 +847,7 @@
           <p:cNvPr id="3" name="コンテンツ プレースホルダー 2">
             <a:extLst>
               <a:ext uri="{FF2B5EF4-FFF2-40B4-BE49-F238E27FC236}">
-                <a16:creationId xmlns:a16="http://schemas.microsoft.com/office/drawing/2014/main" id="{7ED9EA8C-25F0-A8E5-4215-0B463A314E04}"/>
+                <a16:creationId xmlns:a16="http://schemas.microsoft.com/office/drawing/2014/main" id="{8FB48953-7CEA-B8BD-1136-1B5C61F6801A}"/>
               </a:ext>
             </a:extLst>
           </p:cNvPr>
@@ -936,7 +936,7 @@
           <p:cNvPr id="4" name="日付プレースホルダー 3">
             <a:extLst>
               <a:ext uri="{FF2B5EF4-FFF2-40B4-BE49-F238E27FC236}">
-                <a16:creationId xmlns:a16="http://schemas.microsoft.com/office/drawing/2014/main" id="{0BD6EC9A-881A-375D-0C9B-354D9BCD57B7}"/>
+                <a16:creationId xmlns:a16="http://schemas.microsoft.com/office/drawing/2014/main" id="{A887B461-3606-0E56-CB75-078CF1E189F6}"/>
               </a:ext>
             </a:extLst>
           </p:cNvPr>
@@ -952,7 +952,7 @@
           <a:bodyPr/>
           <a:lstStyle/>
           <a:p>
-            <a:fld id="{2A58C945-CE02-4F83-A6D0-167C8BCBE6BC}" type="datetimeFigureOut">
+            <a:fld id="{9B8BCB21-04C2-4D3E-9603-2741310A4412}" type="datetimeFigureOut">
               <a:rPr kumimoji="1" lang="ja-JP" altLang="en-US" smtClean="0"/>
               <a:t>2026/9/20</a:t>
             </a:fld>
@@ -965,7 +965,7 @@
           <p:cNvPr id="5" name="フッター プレースホルダー 4">
             <a:extLst>
               <a:ext uri="{FF2B5EF4-FFF2-40B4-BE49-F238E27FC236}">
-                <a16:creationId xmlns:a16="http://schemas.microsoft.com/office/drawing/2014/main" id="{7F8EA591-249D-93F6-C256-65834D532ED9}"/>
+                <a16:creationId xmlns:a16="http://schemas.microsoft.com/office/drawing/2014/main" id="{B3183C1E-6D11-1158-DEDD-B71E5E068A50}"/>
               </a:ext>
             </a:extLst>
           </p:cNvPr>
@@ -990,7 +990,7 @@
           <p:cNvPr id="6" name="スライド番号プレースホルダー 5">
             <a:extLst>
               <a:ext uri="{FF2B5EF4-FFF2-40B4-BE49-F238E27FC236}">
-                <a16:creationId xmlns:a16="http://schemas.microsoft.com/office/drawing/2014/main" id="{214DF0C7-3454-2632-13C8-8C1197CF06E6}"/>
+                <a16:creationId xmlns:a16="http://schemas.microsoft.com/office/drawing/2014/main" id="{9E002F6A-FA9F-3288-C5BB-CCA5C60D3E53}"/>
               </a:ext>
             </a:extLst>
           </p:cNvPr>
@@ -1006,7 +1006,7 @@
           <a:bodyPr/>
           <a:lstStyle/>
           <a:p>
-            <a:fld id="{18992577-D21F-4C21-AD58-BA56B223B010}" type="slidenum">
+            <a:fld id="{789A5AE6-38FD-4285-82C1-7D570708A39C}" type="slidenum">
               <a:rPr kumimoji="1" lang="ja-JP" altLang="en-US" smtClean="0"/>
               <a:t>‹#›</a:t>
             </a:fld>
@@ -1017,7 +1017,7 @@
     </p:spTree>
     <p:extLst>
       <p:ext uri="{BB962C8B-B14F-4D97-AF65-F5344CB8AC3E}">
-        <p14:creationId xmlns:p14="http://schemas.microsoft.com/office/powerpoint/2010/main" val="2667006242"/>
+        <p14:creationId xmlns:p14="http://schemas.microsoft.com/office/powerpoint/2010/main" val="2907850221"/>
       </p:ext>
     </p:extLst>
   </p:cSld>
@@ -1049,7 +1049,7 @@
           <p:cNvPr id="2" name="タイトル 1">
             <a:extLst>
               <a:ext uri="{FF2B5EF4-FFF2-40B4-BE49-F238E27FC236}">
-                <a16:creationId xmlns:a16="http://schemas.microsoft.com/office/drawing/2014/main" id="{229B2E53-86CE-516B-BA79-F79163A476F7}"/>
+                <a16:creationId xmlns:a16="http://schemas.microsoft.com/office/drawing/2014/main" id="{3F10AE2E-8EF3-CDFB-7C46-110CF9A77AC5}"/>
               </a:ext>
             </a:extLst>
           </p:cNvPr>
@@ -1086,7 +1086,7 @@
           <p:cNvPr id="3" name="テキスト プレースホルダー 2">
             <a:extLst>
               <a:ext uri="{FF2B5EF4-FFF2-40B4-BE49-F238E27FC236}">
-                <a16:creationId xmlns:a16="http://schemas.microsoft.com/office/drawing/2014/main" id="{BECA2682-7228-A49D-DA04-692F508DA4DB}"/>
+                <a16:creationId xmlns:a16="http://schemas.microsoft.com/office/drawing/2014/main" id="{43A59A4A-F51E-A0B4-7DAC-28F9C5ECC723}"/>
               </a:ext>
             </a:extLst>
           </p:cNvPr>
@@ -1211,7 +1211,7 @@
           <p:cNvPr id="4" name="日付プレースホルダー 3">
             <a:extLst>
               <a:ext uri="{FF2B5EF4-FFF2-40B4-BE49-F238E27FC236}">
-                <a16:creationId xmlns:a16="http://schemas.microsoft.com/office/drawing/2014/main" id="{4B660466-4B4D-975C-115F-B1109A2A2805}"/>
+                <a16:creationId xmlns:a16="http://schemas.microsoft.com/office/drawing/2014/main" id="{A6BEEEC5-8F61-DA9A-B2EC-A18D0D368F78}"/>
               </a:ext>
             </a:extLst>
           </p:cNvPr>
@@ -1227,7 +1227,7 @@
           <a:bodyPr/>
           <a:lstStyle/>
           <a:p>
-            <a:fld id="{2A58C945-CE02-4F83-A6D0-167C8BCBE6BC}" type="datetimeFigureOut">
+            <a:fld id="{9B8BCB21-04C2-4D3E-9603-2741310A4412}" type="datetimeFigureOut">
               <a:rPr kumimoji="1" lang="ja-JP" altLang="en-US" smtClean="0"/>
               <a:t>2026/9/20</a:t>
             </a:fld>
@@ -1240,7 +1240,7 @@
           <p:cNvPr id="5" name="フッター プレースホルダー 4">
             <a:extLst>
               <a:ext uri="{FF2B5EF4-FFF2-40B4-BE49-F238E27FC236}">
-                <a16:creationId xmlns:a16="http://schemas.microsoft.com/office/drawing/2014/main" id="{E01EF224-1B8D-5D9B-5E04-34AA54FA3AE1}"/>
+                <a16:creationId xmlns:a16="http://schemas.microsoft.com/office/drawing/2014/main" id="{4A4130E3-ACA4-0F91-C586-BFC63C073C9D}"/>
               </a:ext>
             </a:extLst>
           </p:cNvPr>
@@ -1265,7 +1265,7 @@
           <p:cNvPr id="6" name="スライド番号プレースホルダー 5">
             <a:extLst>
               <a:ext uri="{FF2B5EF4-FFF2-40B4-BE49-F238E27FC236}">
-                <a16:creationId xmlns:a16="http://schemas.microsoft.com/office/drawing/2014/main" id="{BE48AF6F-34CA-1D62-3793-D354BFCF162F}"/>
+                <a16:creationId xmlns:a16="http://schemas.microsoft.com/office/drawing/2014/main" id="{EAFFDEF7-3241-DED3-1507-EE677B0DF664}"/>
               </a:ext>
             </a:extLst>
           </p:cNvPr>
@@ -1281,7 +1281,7 @@
           <a:bodyPr/>
           <a:lstStyle/>
           <a:p>
-            <a:fld id="{18992577-D21F-4C21-AD58-BA56B223B010}" type="slidenum">
+            <a:fld id="{789A5AE6-38FD-4285-82C1-7D570708A39C}" type="slidenum">
               <a:rPr kumimoji="1" lang="ja-JP" altLang="en-US" smtClean="0"/>
               <a:t>‹#›</a:t>
             </a:fld>
@@ -1292,7 +1292,7 @@
     </p:spTree>
     <p:extLst>
       <p:ext uri="{BB962C8B-B14F-4D97-AF65-F5344CB8AC3E}">
-        <p14:creationId xmlns:p14="http://schemas.microsoft.com/office/powerpoint/2010/main" val="4001591075"/>
+        <p14:creationId xmlns:p14="http://schemas.microsoft.com/office/powerpoint/2010/main" val="2104728939"/>
       </p:ext>
     </p:extLst>
   </p:cSld>
@@ -1324,7 +1324,7 @@
           <p:cNvPr id="2" name="タイトル 1">
             <a:extLst>
               <a:ext uri="{FF2B5EF4-FFF2-40B4-BE49-F238E27FC236}">
-                <a16:creationId xmlns:a16="http://schemas.microsoft.com/office/drawing/2014/main" id="{17280D5E-8A78-125B-4068-AE7C6AF6EC9E}"/>
+                <a16:creationId xmlns:a16="http://schemas.microsoft.com/office/drawing/2014/main" id="{F97880B5-C73E-727D-947F-4B0A9565E07E}"/>
               </a:ext>
             </a:extLst>
           </p:cNvPr>
@@ -1352,7 +1352,7 @@
           <p:cNvPr id="3" name="コンテンツ プレースホルダー 2">
             <a:extLst>
               <a:ext uri="{FF2B5EF4-FFF2-40B4-BE49-F238E27FC236}">
-                <a16:creationId xmlns:a16="http://schemas.microsoft.com/office/drawing/2014/main" id="{0BDD03B6-3616-F84A-1AE2-3E922E16D8DF}"/>
+                <a16:creationId xmlns:a16="http://schemas.microsoft.com/office/drawing/2014/main" id="{66F9C9F2-E248-14FD-C0C0-177D8959C504}"/>
               </a:ext>
             </a:extLst>
           </p:cNvPr>
@@ -1446,7 +1446,7 @@
           <p:cNvPr id="4" name="コンテンツ プレースホルダー 3">
             <a:extLst>
               <a:ext uri="{FF2B5EF4-FFF2-40B4-BE49-F238E27FC236}">
-                <a16:creationId xmlns:a16="http://schemas.microsoft.com/office/drawing/2014/main" id="{9A0C91B0-DFDF-950E-D967-E6848682FA34}"/>
+                <a16:creationId xmlns:a16="http://schemas.microsoft.com/office/drawing/2014/main" id="{0AB80443-71A9-5DA5-1816-AB3C359DAB97}"/>
               </a:ext>
             </a:extLst>
           </p:cNvPr>
@@ -1540,7 +1540,7 @@
           <p:cNvPr id="5" name="日付プレースホルダー 4">
             <a:extLst>
               <a:ext uri="{FF2B5EF4-FFF2-40B4-BE49-F238E27FC236}">
-                <a16:creationId xmlns:a16="http://schemas.microsoft.com/office/drawing/2014/main" id="{A83C4362-1C1D-BCE0-56DC-FD512B3F253C}"/>
+                <a16:creationId xmlns:a16="http://schemas.microsoft.com/office/drawing/2014/main" id="{D20099E9-4B16-2A50-1890-B91C3DBB588A}"/>
               </a:ext>
             </a:extLst>
           </p:cNvPr>
@@ -1556,7 +1556,7 @@
           <a:bodyPr/>
           <a:lstStyle/>
           <a:p>
-            <a:fld id="{2A58C945-CE02-4F83-A6D0-167C8BCBE6BC}" type="datetimeFigureOut">
+            <a:fld id="{9B8BCB21-04C2-4D3E-9603-2741310A4412}" type="datetimeFigureOut">
               <a:rPr kumimoji="1" lang="ja-JP" altLang="en-US" smtClean="0"/>
               <a:t>2026/9/20</a:t>
             </a:fld>
@@ -1569,7 +1569,7 @@
           <p:cNvPr id="6" name="フッター プレースホルダー 5">
             <a:extLst>
               <a:ext uri="{FF2B5EF4-FFF2-40B4-BE49-F238E27FC236}">
-                <a16:creationId xmlns:a16="http://schemas.microsoft.com/office/drawing/2014/main" id="{AFF0C1A6-8192-2DC4-F0D5-90B50AEFC922}"/>
+                <a16:creationId xmlns:a16="http://schemas.microsoft.com/office/drawing/2014/main" id="{F90C2F3E-FCDA-7678-E337-7C630E21ADCE}"/>
               </a:ext>
             </a:extLst>
           </p:cNvPr>
@@ -1594,7 +1594,7 @@
           <p:cNvPr id="7" name="スライド番号プレースホルダー 6">
             <a:extLst>
               <a:ext uri="{FF2B5EF4-FFF2-40B4-BE49-F238E27FC236}">
-                <a16:creationId xmlns:a16="http://schemas.microsoft.com/office/drawing/2014/main" id="{82356D60-14D5-9FC3-9E47-EF23F4DB9669}"/>
+                <a16:creationId xmlns:a16="http://schemas.microsoft.com/office/drawing/2014/main" id="{544B3ED2-909D-F72B-C0B7-7201EDAD62C3}"/>
               </a:ext>
             </a:extLst>
           </p:cNvPr>
@@ -1610,7 +1610,7 @@
           <a:bodyPr/>
           <a:lstStyle/>
           <a:p>
-            <a:fld id="{18992577-D21F-4C21-AD58-BA56B223B010}" type="slidenum">
+            <a:fld id="{789A5AE6-38FD-4285-82C1-7D570708A39C}" type="slidenum">
               <a:rPr kumimoji="1" lang="ja-JP" altLang="en-US" smtClean="0"/>
               <a:t>‹#›</a:t>
             </a:fld>
@@ -1621,7 +1621,7 @@
     </p:spTree>
     <p:extLst>
       <p:ext uri="{BB962C8B-B14F-4D97-AF65-F5344CB8AC3E}">
-        <p14:creationId xmlns:p14="http://schemas.microsoft.com/office/powerpoint/2010/main" val="4256553532"/>
+        <p14:creationId xmlns:p14="http://schemas.microsoft.com/office/powerpoint/2010/main" val="2498051671"/>
       </p:ext>
     </p:extLst>
   </p:cSld>
@@ -1653,7 +1653,7 @@
           <p:cNvPr id="2" name="タイトル 1">
             <a:extLst>
               <a:ext uri="{FF2B5EF4-FFF2-40B4-BE49-F238E27FC236}">
-                <a16:creationId xmlns:a16="http://schemas.microsoft.com/office/drawing/2014/main" id="{5EE52A0F-5AF3-A4C0-F937-33D66C4C4A08}"/>
+                <a16:creationId xmlns:a16="http://schemas.microsoft.com/office/drawing/2014/main" id="{E5F517C3-9A32-4DDC-537C-5D97EE03B8F3}"/>
               </a:ext>
             </a:extLst>
           </p:cNvPr>
@@ -1686,7 +1686,7 @@
           <p:cNvPr id="3" name="テキスト プレースホルダー 2">
             <a:extLst>
               <a:ext uri="{FF2B5EF4-FFF2-40B4-BE49-F238E27FC236}">
-                <a16:creationId xmlns:a16="http://schemas.microsoft.com/office/drawing/2014/main" id="{BF9AB22E-7A6A-609C-440F-91CFC56CA612}"/>
+                <a16:creationId xmlns:a16="http://schemas.microsoft.com/office/drawing/2014/main" id="{FEBE1D2E-BD8A-A887-E857-0595D30C1416}"/>
               </a:ext>
             </a:extLst>
           </p:cNvPr>
@@ -1757,7 +1757,7 @@
           <p:cNvPr id="4" name="コンテンツ プレースホルダー 3">
             <a:extLst>
               <a:ext uri="{FF2B5EF4-FFF2-40B4-BE49-F238E27FC236}">
-                <a16:creationId xmlns:a16="http://schemas.microsoft.com/office/drawing/2014/main" id="{EC52266D-624E-BD7D-EC6E-91BB46F1D49A}"/>
+                <a16:creationId xmlns:a16="http://schemas.microsoft.com/office/drawing/2014/main" id="{893F1788-1A38-F6A7-756E-E3E6235DFF3A}"/>
               </a:ext>
             </a:extLst>
           </p:cNvPr>
@@ -1851,7 +1851,7 @@
           <p:cNvPr id="5" name="テキスト プレースホルダー 4">
             <a:extLst>
               <a:ext uri="{FF2B5EF4-FFF2-40B4-BE49-F238E27FC236}">
-                <a16:creationId xmlns:a16="http://schemas.microsoft.com/office/drawing/2014/main" id="{23EC44AC-089F-194A-4EDB-2A859F1D6092}"/>
+                <a16:creationId xmlns:a16="http://schemas.microsoft.com/office/drawing/2014/main" id="{B1C2A5F6-B17C-77CA-5645-F84FA57BA32F}"/>
               </a:ext>
             </a:extLst>
           </p:cNvPr>
@@ -1922,7 +1922,7 @@
           <p:cNvPr id="6" name="コンテンツ プレースホルダー 5">
             <a:extLst>
               <a:ext uri="{FF2B5EF4-FFF2-40B4-BE49-F238E27FC236}">
-                <a16:creationId xmlns:a16="http://schemas.microsoft.com/office/drawing/2014/main" id="{CEF4829D-0749-DC07-87A1-305ACE4BB1BC}"/>
+                <a16:creationId xmlns:a16="http://schemas.microsoft.com/office/drawing/2014/main" id="{76AF0776-ED1B-62C1-1F3C-6845E9936B6B}"/>
               </a:ext>
             </a:extLst>
           </p:cNvPr>
@@ -2016,7 +2016,7 @@
           <p:cNvPr id="7" name="日付プレースホルダー 6">
             <a:extLst>
               <a:ext uri="{FF2B5EF4-FFF2-40B4-BE49-F238E27FC236}">
-                <a16:creationId xmlns:a16="http://schemas.microsoft.com/office/drawing/2014/main" id="{D9A5E8CA-33BA-9DBC-F705-4156A9D63E46}"/>
+                <a16:creationId xmlns:a16="http://schemas.microsoft.com/office/drawing/2014/main" id="{457AC99B-58C4-6632-ABAB-603C64169B78}"/>
               </a:ext>
             </a:extLst>
           </p:cNvPr>
@@ -2032,7 +2032,7 @@
           <a:bodyPr/>
           <a:lstStyle/>
           <a:p>
-            <a:fld id="{2A58C945-CE02-4F83-A6D0-167C8BCBE6BC}" type="datetimeFigureOut">
+            <a:fld id="{9B8BCB21-04C2-4D3E-9603-2741310A4412}" type="datetimeFigureOut">
               <a:rPr kumimoji="1" lang="ja-JP" altLang="en-US" smtClean="0"/>
               <a:t>2026/9/20</a:t>
             </a:fld>
@@ -2045,7 +2045,7 @@
           <p:cNvPr id="8" name="フッター プレースホルダー 7">
             <a:extLst>
               <a:ext uri="{FF2B5EF4-FFF2-40B4-BE49-F238E27FC236}">
-                <a16:creationId xmlns:a16="http://schemas.microsoft.com/office/drawing/2014/main" id="{6E0A52D2-73A1-E05E-5BCA-D3CC8114CB93}"/>
+                <a16:creationId xmlns:a16="http://schemas.microsoft.com/office/drawing/2014/main" id="{544869AA-BE49-B3BA-D921-C53ED50D9252}"/>
               </a:ext>
             </a:extLst>
           </p:cNvPr>
@@ -2070,7 +2070,7 @@
           <p:cNvPr id="9" name="スライド番号プレースホルダー 8">
             <a:extLst>
               <a:ext uri="{FF2B5EF4-FFF2-40B4-BE49-F238E27FC236}">
-                <a16:creationId xmlns:a16="http://schemas.microsoft.com/office/drawing/2014/main" id="{F92B61E7-A08A-A421-A83E-879D46B0B269}"/>
+                <a16:creationId xmlns:a16="http://schemas.microsoft.com/office/drawing/2014/main" id="{0A86F9DB-35B2-6A28-9B15-143039C27119}"/>
               </a:ext>
             </a:extLst>
           </p:cNvPr>
@@ -2086,7 +2086,7 @@
           <a:bodyPr/>
           <a:lstStyle/>
           <a:p>
-            <a:fld id="{18992577-D21F-4C21-AD58-BA56B223B010}" type="slidenum">
+            <a:fld id="{789A5AE6-38FD-4285-82C1-7D570708A39C}" type="slidenum">
               <a:rPr kumimoji="1" lang="ja-JP" altLang="en-US" smtClean="0"/>
               <a:t>‹#›</a:t>
             </a:fld>
@@ -2097,7 +2097,7 @@
     </p:spTree>
     <p:extLst>
       <p:ext uri="{BB962C8B-B14F-4D97-AF65-F5344CB8AC3E}">
-        <p14:creationId xmlns:p14="http://schemas.microsoft.com/office/powerpoint/2010/main" val="714270387"/>
+        <p14:creationId xmlns:p14="http://schemas.microsoft.com/office/powerpoint/2010/main" val="2506381878"/>
       </p:ext>
     </p:extLst>
   </p:cSld>
@@ -2129,7 +2129,7 @@
           <p:cNvPr id="2" name="タイトル 1">
             <a:extLst>
               <a:ext uri="{FF2B5EF4-FFF2-40B4-BE49-F238E27FC236}">
-                <a16:creationId xmlns:a16="http://schemas.microsoft.com/office/drawing/2014/main" id="{3BCF6722-D737-4ED3-6C49-351916BF9C73}"/>
+                <a16:creationId xmlns:a16="http://schemas.microsoft.com/office/drawing/2014/main" id="{B4CAA1C9-B112-07A7-22C1-8E990BF5ECCB}"/>
               </a:ext>
             </a:extLst>
           </p:cNvPr>
@@ -2157,7 +2157,7 @@
           <p:cNvPr id="3" name="日付プレースホルダー 2">
             <a:extLst>
               <a:ext uri="{FF2B5EF4-FFF2-40B4-BE49-F238E27FC236}">
-                <a16:creationId xmlns:a16="http://schemas.microsoft.com/office/drawing/2014/main" id="{5FC18464-0906-09C6-D832-262E052F1219}"/>
+                <a16:creationId xmlns:a16="http://schemas.microsoft.com/office/drawing/2014/main" id="{C816D94B-06E6-3101-9FBF-B987372AE881}"/>
               </a:ext>
             </a:extLst>
           </p:cNvPr>
@@ -2173,7 +2173,7 @@
           <a:bodyPr/>
           <a:lstStyle/>
           <a:p>
-            <a:fld id="{2A58C945-CE02-4F83-A6D0-167C8BCBE6BC}" type="datetimeFigureOut">
+            <a:fld id="{9B8BCB21-04C2-4D3E-9603-2741310A4412}" type="datetimeFigureOut">
               <a:rPr kumimoji="1" lang="ja-JP" altLang="en-US" smtClean="0"/>
               <a:t>2026/9/20</a:t>
             </a:fld>
@@ -2186,7 +2186,7 @@
           <p:cNvPr id="4" name="フッター プレースホルダー 3">
             <a:extLst>
               <a:ext uri="{FF2B5EF4-FFF2-40B4-BE49-F238E27FC236}">
-                <a16:creationId xmlns:a16="http://schemas.microsoft.com/office/drawing/2014/main" id="{9F767F9E-DB7F-89F9-F0C2-86C2A28C189E}"/>
+                <a16:creationId xmlns:a16="http://schemas.microsoft.com/office/drawing/2014/main" id="{D02AC746-4874-EEE8-EC70-279D2DD81BB6}"/>
               </a:ext>
             </a:extLst>
           </p:cNvPr>
@@ -2211,7 +2211,7 @@
           <p:cNvPr id="5" name="スライド番号プレースホルダー 4">
             <a:extLst>
               <a:ext uri="{FF2B5EF4-FFF2-40B4-BE49-F238E27FC236}">
-                <a16:creationId xmlns:a16="http://schemas.microsoft.com/office/drawing/2014/main" id="{FECB71E7-D082-A36A-81E3-D01B4650EA92}"/>
+                <a16:creationId xmlns:a16="http://schemas.microsoft.com/office/drawing/2014/main" id="{B9323846-4754-6E3D-4B40-35C55EEFA206}"/>
               </a:ext>
             </a:extLst>
           </p:cNvPr>
@@ -2227,7 +2227,7 @@
           <a:bodyPr/>
           <a:lstStyle/>
           <a:p>
-            <a:fld id="{18992577-D21F-4C21-AD58-BA56B223B010}" type="slidenum">
+            <a:fld id="{789A5AE6-38FD-4285-82C1-7D570708A39C}" type="slidenum">
               <a:rPr kumimoji="1" lang="ja-JP" altLang="en-US" smtClean="0"/>
               <a:t>‹#›</a:t>
             </a:fld>
@@ -2238,7 +2238,7 @@
     </p:spTree>
     <p:extLst>
       <p:ext uri="{BB962C8B-B14F-4D97-AF65-F5344CB8AC3E}">
-        <p14:creationId xmlns:p14="http://schemas.microsoft.com/office/powerpoint/2010/main" val="2696728787"/>
+        <p14:creationId xmlns:p14="http://schemas.microsoft.com/office/powerpoint/2010/main" val="2636949781"/>
       </p:ext>
     </p:extLst>
   </p:cSld>
@@ -2270,7 +2270,7 @@
           <p:cNvPr id="2" name="日付プレースホルダー 1">
             <a:extLst>
               <a:ext uri="{FF2B5EF4-FFF2-40B4-BE49-F238E27FC236}">
-                <a16:creationId xmlns:a16="http://schemas.microsoft.com/office/drawing/2014/main" id="{6E72BBC0-0D84-8AE1-4C8A-02F5D034A991}"/>
+                <a16:creationId xmlns:a16="http://schemas.microsoft.com/office/drawing/2014/main" id="{B988B0E1-B154-0FAD-E721-A27BCD6CE188}"/>
               </a:ext>
             </a:extLst>
           </p:cNvPr>
@@ -2286,7 +2286,7 @@
           <a:bodyPr/>
           <a:lstStyle/>
           <a:p>
-            <a:fld id="{2A58C945-CE02-4F83-A6D0-167C8BCBE6BC}" type="datetimeFigureOut">
+            <a:fld id="{9B8BCB21-04C2-4D3E-9603-2741310A4412}" type="datetimeFigureOut">
               <a:rPr kumimoji="1" lang="ja-JP" altLang="en-US" smtClean="0"/>
               <a:t>2026/9/20</a:t>
             </a:fld>
@@ -2299,7 +2299,7 @@
           <p:cNvPr id="3" name="フッター プレースホルダー 2">
             <a:extLst>
               <a:ext uri="{FF2B5EF4-FFF2-40B4-BE49-F238E27FC236}">
-                <a16:creationId xmlns:a16="http://schemas.microsoft.com/office/drawing/2014/main" id="{3BC7BAB6-F9EF-3D30-1B01-B8152E5C21FB}"/>
+                <a16:creationId xmlns:a16="http://schemas.microsoft.com/office/drawing/2014/main" id="{D06C3289-25E3-1648-0218-3686482DD84D}"/>
               </a:ext>
             </a:extLst>
           </p:cNvPr>
@@ -2324,7 +2324,7 @@
           <p:cNvPr id="4" name="スライド番号プレースホルダー 3">
             <a:extLst>
               <a:ext uri="{FF2B5EF4-FFF2-40B4-BE49-F238E27FC236}">
-                <a16:creationId xmlns:a16="http://schemas.microsoft.com/office/drawing/2014/main" id="{82858777-861B-50CD-ED8B-D3D132C0614E}"/>
+                <a16:creationId xmlns:a16="http://schemas.microsoft.com/office/drawing/2014/main" id="{3EBE6ABD-EF38-B667-537E-C8154859D98B}"/>
               </a:ext>
             </a:extLst>
           </p:cNvPr>
@@ -2340,7 +2340,7 @@
           <a:bodyPr/>
           <a:lstStyle/>
           <a:p>
-            <a:fld id="{18992577-D21F-4C21-AD58-BA56B223B010}" type="slidenum">
+            <a:fld id="{789A5AE6-38FD-4285-82C1-7D570708A39C}" type="slidenum">
               <a:rPr kumimoji="1" lang="ja-JP" altLang="en-US" smtClean="0"/>
               <a:t>‹#›</a:t>
             </a:fld>
@@ -2351,7 +2351,7 @@
     </p:spTree>
     <p:extLst>
       <p:ext uri="{BB962C8B-B14F-4D97-AF65-F5344CB8AC3E}">
-        <p14:creationId xmlns:p14="http://schemas.microsoft.com/office/powerpoint/2010/main" val="859148624"/>
+        <p14:creationId xmlns:p14="http://schemas.microsoft.com/office/powerpoint/2010/main" val="1734658677"/>
       </p:ext>
     </p:extLst>
   </p:cSld>
@@ -2383,7 +2383,7 @@
           <p:cNvPr id="2" name="タイトル 1">
             <a:extLst>
               <a:ext uri="{FF2B5EF4-FFF2-40B4-BE49-F238E27FC236}">
-                <a16:creationId xmlns:a16="http://schemas.microsoft.com/office/drawing/2014/main" id="{C77A8C4E-6429-28A1-71E3-85F8A8859158}"/>
+                <a16:creationId xmlns:a16="http://schemas.microsoft.com/office/drawing/2014/main" id="{2BFB7AAB-8552-21B7-9312-451D428B024D}"/>
               </a:ext>
             </a:extLst>
           </p:cNvPr>
@@ -2420,7 +2420,7 @@
           <p:cNvPr id="3" name="コンテンツ プレースホルダー 2">
             <a:extLst>
               <a:ext uri="{FF2B5EF4-FFF2-40B4-BE49-F238E27FC236}">
-                <a16:creationId xmlns:a16="http://schemas.microsoft.com/office/drawing/2014/main" id="{FCB2C09D-B1D3-4444-4873-A11D1C62EE03}"/>
+                <a16:creationId xmlns:a16="http://schemas.microsoft.com/office/drawing/2014/main" id="{EB42CC6B-7DC4-8F2C-C632-731E2E264501}"/>
               </a:ext>
             </a:extLst>
           </p:cNvPr>
@@ -2542,7 +2542,7 @@
           <p:cNvPr id="4" name="テキスト プレースホルダー 3">
             <a:extLst>
               <a:ext uri="{FF2B5EF4-FFF2-40B4-BE49-F238E27FC236}">
-                <a16:creationId xmlns:a16="http://schemas.microsoft.com/office/drawing/2014/main" id="{B1073CBE-05BB-63E4-5624-AE6451AB2BA6}"/>
+                <a16:creationId xmlns:a16="http://schemas.microsoft.com/office/drawing/2014/main" id="{AB842131-7995-8F67-5C59-34FC826B1940}"/>
               </a:ext>
             </a:extLst>
           </p:cNvPr>
@@ -2613,7 +2613,7 @@
           <p:cNvPr id="5" name="日付プレースホルダー 4">
             <a:extLst>
               <a:ext uri="{FF2B5EF4-FFF2-40B4-BE49-F238E27FC236}">
-                <a16:creationId xmlns:a16="http://schemas.microsoft.com/office/drawing/2014/main" id="{FFE64A07-D830-7DEF-7881-8BFD134A4287}"/>
+                <a16:creationId xmlns:a16="http://schemas.microsoft.com/office/drawing/2014/main" id="{6946B4FF-287D-8CA2-7777-BF0466C16EB2}"/>
               </a:ext>
             </a:extLst>
           </p:cNvPr>
@@ -2629,7 +2629,7 @@
           <a:bodyPr/>
           <a:lstStyle/>
           <a:p>
-            <a:fld id="{2A58C945-CE02-4F83-A6D0-167C8BCBE6BC}" type="datetimeFigureOut">
+            <a:fld id="{9B8BCB21-04C2-4D3E-9603-2741310A4412}" type="datetimeFigureOut">
               <a:rPr kumimoji="1" lang="ja-JP" altLang="en-US" smtClean="0"/>
               <a:t>2026/9/20</a:t>
             </a:fld>
@@ -2642,7 +2642,7 @@
           <p:cNvPr id="6" name="フッター プレースホルダー 5">
             <a:extLst>
               <a:ext uri="{FF2B5EF4-FFF2-40B4-BE49-F238E27FC236}">
-                <a16:creationId xmlns:a16="http://schemas.microsoft.com/office/drawing/2014/main" id="{4336E0D3-604A-8107-E13F-EE37FD98DEC7}"/>
+                <a16:creationId xmlns:a16="http://schemas.microsoft.com/office/drawing/2014/main" id="{E69A89CA-3542-BBE1-5513-5F6041C2014E}"/>
               </a:ext>
             </a:extLst>
           </p:cNvPr>
@@ -2667,7 +2667,7 @@
           <p:cNvPr id="7" name="スライド番号プレースホルダー 6">
             <a:extLst>
               <a:ext uri="{FF2B5EF4-FFF2-40B4-BE49-F238E27FC236}">
-                <a16:creationId xmlns:a16="http://schemas.microsoft.com/office/drawing/2014/main" id="{FD4E1FAD-D2BA-3D9F-8022-F7244958CCE7}"/>
+                <a16:creationId xmlns:a16="http://schemas.microsoft.com/office/drawing/2014/main" id="{267B3BAB-9A60-2C8D-F311-0D6817C3E42B}"/>
               </a:ext>
             </a:extLst>
           </p:cNvPr>
@@ -2683,7 +2683,7 @@
           <a:bodyPr/>
           <a:lstStyle/>
           <a:p>
-            <a:fld id="{18992577-D21F-4C21-AD58-BA56B223B010}" type="slidenum">
+            <a:fld id="{789A5AE6-38FD-4285-82C1-7D570708A39C}" type="slidenum">
               <a:rPr kumimoji="1" lang="ja-JP" altLang="en-US" smtClean="0"/>
               <a:t>‹#›</a:t>
             </a:fld>
@@ -2694,7 +2694,7 @@
     </p:spTree>
     <p:extLst>
       <p:ext uri="{BB962C8B-B14F-4D97-AF65-F5344CB8AC3E}">
-        <p14:creationId xmlns:p14="http://schemas.microsoft.com/office/powerpoint/2010/main" val="1372947029"/>
+        <p14:creationId xmlns:p14="http://schemas.microsoft.com/office/powerpoint/2010/main" val="958272404"/>
       </p:ext>
     </p:extLst>
   </p:cSld>
@@ -2726,7 +2726,7 @@
           <p:cNvPr id="2" name="タイトル 1">
             <a:extLst>
               <a:ext uri="{FF2B5EF4-FFF2-40B4-BE49-F238E27FC236}">
-                <a16:creationId xmlns:a16="http://schemas.microsoft.com/office/drawing/2014/main" id="{D65F9452-679F-655D-DA1C-CF99F6F5B1AB}"/>
+                <a16:creationId xmlns:a16="http://schemas.microsoft.com/office/drawing/2014/main" id="{BB67298C-E87E-DDA0-1EED-2E0230F89E88}"/>
               </a:ext>
             </a:extLst>
           </p:cNvPr>
@@ -2763,7 +2763,7 @@
           <p:cNvPr id="3" name="図プレースホルダー 2">
             <a:extLst>
               <a:ext uri="{FF2B5EF4-FFF2-40B4-BE49-F238E27FC236}">
-                <a16:creationId xmlns:a16="http://schemas.microsoft.com/office/drawing/2014/main" id="{4AB2A72E-609E-1A5C-076A-9870B5452D57}"/>
+                <a16:creationId xmlns:a16="http://schemas.microsoft.com/office/drawing/2014/main" id="{5F53678D-49A4-EF77-4205-4C35D34B54C5}"/>
               </a:ext>
             </a:extLst>
           </p:cNvPr>
@@ -2830,7 +2830,7 @@
           <p:cNvPr id="4" name="テキスト プレースホルダー 3">
             <a:extLst>
               <a:ext uri="{FF2B5EF4-FFF2-40B4-BE49-F238E27FC236}">
-                <a16:creationId xmlns:a16="http://schemas.microsoft.com/office/drawing/2014/main" id="{125BCEBB-DAD9-8125-2E8D-06329D19EA06}"/>
+                <a16:creationId xmlns:a16="http://schemas.microsoft.com/office/drawing/2014/main" id="{ADAEE990-10E4-8BCA-9844-3FD2772794B8}"/>
               </a:ext>
             </a:extLst>
           </p:cNvPr>
@@ -2901,7 +2901,7 @@
           <p:cNvPr id="5" name="日付プレースホルダー 4">
             <a:extLst>
               <a:ext uri="{FF2B5EF4-FFF2-40B4-BE49-F238E27FC236}">
-                <a16:creationId xmlns:a16="http://schemas.microsoft.com/office/drawing/2014/main" id="{7AE01EE7-D219-02D9-A138-D2885750BBE6}"/>
+                <a16:creationId xmlns:a16="http://schemas.microsoft.com/office/drawing/2014/main" id="{7774F213-77BE-8A02-E60A-2E6F6A4ACE83}"/>
               </a:ext>
             </a:extLst>
           </p:cNvPr>
@@ -2917,7 +2917,7 @@
           <a:bodyPr/>
           <a:lstStyle/>
           <a:p>
-            <a:fld id="{2A58C945-CE02-4F83-A6D0-167C8BCBE6BC}" type="datetimeFigureOut">
+            <a:fld id="{9B8BCB21-04C2-4D3E-9603-2741310A4412}" type="datetimeFigureOut">
               <a:rPr kumimoji="1" lang="ja-JP" altLang="en-US" smtClean="0"/>
               <a:t>2026/9/20</a:t>
             </a:fld>
@@ -2930,7 +2930,7 @@
           <p:cNvPr id="6" name="フッター プレースホルダー 5">
             <a:extLst>
               <a:ext uri="{FF2B5EF4-FFF2-40B4-BE49-F238E27FC236}">
-                <a16:creationId xmlns:a16="http://schemas.microsoft.com/office/drawing/2014/main" id="{8159221D-AC7B-51B3-A8BC-15A8A8426F70}"/>
+                <a16:creationId xmlns:a16="http://schemas.microsoft.com/office/drawing/2014/main" id="{FA77DD32-7E06-7CE7-6D35-DF5EF603E41A}"/>
               </a:ext>
             </a:extLst>
           </p:cNvPr>
@@ -2955,7 +2955,7 @@
           <p:cNvPr id="7" name="スライド番号プレースホルダー 6">
             <a:extLst>
               <a:ext uri="{FF2B5EF4-FFF2-40B4-BE49-F238E27FC236}">
-                <a16:creationId xmlns:a16="http://schemas.microsoft.com/office/drawing/2014/main" id="{C7A2C5D8-6B18-6C22-BA14-B3D820A968D4}"/>
+                <a16:creationId xmlns:a16="http://schemas.microsoft.com/office/drawing/2014/main" id="{BEB3D334-6E29-010E-8DD6-F82B386E5B4B}"/>
               </a:ext>
             </a:extLst>
           </p:cNvPr>
@@ -2971,7 +2971,7 @@
           <a:bodyPr/>
           <a:lstStyle/>
           <a:p>
-            <a:fld id="{18992577-D21F-4C21-AD58-BA56B223B010}" type="slidenum">
+            <a:fld id="{789A5AE6-38FD-4285-82C1-7D570708A39C}" type="slidenum">
               <a:rPr kumimoji="1" lang="ja-JP" altLang="en-US" smtClean="0"/>
               <a:t>‹#›</a:t>
             </a:fld>
@@ -2982,7 +2982,7 @@
     </p:spTree>
     <p:extLst>
       <p:ext uri="{BB962C8B-B14F-4D97-AF65-F5344CB8AC3E}">
-        <p14:creationId xmlns:p14="http://schemas.microsoft.com/office/powerpoint/2010/main" val="4129476949"/>
+        <p14:creationId xmlns:p14="http://schemas.microsoft.com/office/powerpoint/2010/main" val="3965547727"/>
       </p:ext>
     </p:extLst>
   </p:cSld>
@@ -3019,7 +3019,7 @@
           <p:cNvPr id="2" name="タイトル プレースホルダー 1">
             <a:extLst>
               <a:ext uri="{FF2B5EF4-FFF2-40B4-BE49-F238E27FC236}">
-                <a16:creationId xmlns:a16="http://schemas.microsoft.com/office/drawing/2014/main" id="{D87F633D-DCCB-77DE-478A-232E3ADAFB09}"/>
+                <a16:creationId xmlns:a16="http://schemas.microsoft.com/office/drawing/2014/main" id="{6798CA37-DAD3-49ED-403E-71C92B296E85}"/>
               </a:ext>
             </a:extLst>
           </p:cNvPr>
@@ -3057,7 +3057,7 @@
           <p:cNvPr id="3" name="テキスト プレースホルダー 2">
             <a:extLst>
               <a:ext uri="{FF2B5EF4-FFF2-40B4-BE49-F238E27FC236}">
-                <a16:creationId xmlns:a16="http://schemas.microsoft.com/office/drawing/2014/main" id="{E8BF6769-A4F3-2504-1880-2FE329FEF79E}"/>
+                <a16:creationId xmlns:a16="http://schemas.microsoft.com/office/drawing/2014/main" id="{9F7785B4-988C-60D9-5870-C9938A236F37}"/>
               </a:ext>
             </a:extLst>
           </p:cNvPr>
@@ -3156,7 +3156,7 @@
           <p:cNvPr id="4" name="日付プレースホルダー 3">
             <a:extLst>
               <a:ext uri="{FF2B5EF4-FFF2-40B4-BE49-F238E27FC236}">
-                <a16:creationId xmlns:a16="http://schemas.microsoft.com/office/drawing/2014/main" id="{93A8AF2D-D052-7259-9F75-7A76623B98AA}"/>
+                <a16:creationId xmlns:a16="http://schemas.microsoft.com/office/drawing/2014/main" id="{4DF4E6C0-7A50-D609-1525-E0E4A1EEDE27}"/>
               </a:ext>
             </a:extLst>
           </p:cNvPr>
@@ -3190,7 +3190,7 @@
             </a:lvl1pPr>
           </a:lstStyle>
           <a:p>
-            <a:fld id="{2A58C945-CE02-4F83-A6D0-167C8BCBE6BC}" type="datetimeFigureOut">
+            <a:fld id="{9B8BCB21-04C2-4D3E-9603-2741310A4412}" type="datetimeFigureOut">
               <a:rPr kumimoji="1" lang="ja-JP" altLang="en-US" smtClean="0"/>
               <a:t>2026/9/20</a:t>
             </a:fld>
@@ -3203,7 +3203,7 @@
           <p:cNvPr id="5" name="フッター プレースホルダー 4">
             <a:extLst>
               <a:ext uri="{FF2B5EF4-FFF2-40B4-BE49-F238E27FC236}">
-                <a16:creationId xmlns:a16="http://schemas.microsoft.com/office/drawing/2014/main" id="{4AC75617-BB1A-4D26-979F-3BF8E6A01ABB}"/>
+                <a16:creationId xmlns:a16="http://schemas.microsoft.com/office/drawing/2014/main" id="{E9E691EF-43D9-0A6E-CAD1-C59B9913B474}"/>
               </a:ext>
             </a:extLst>
           </p:cNvPr>
@@ -3246,7 +3246,7 @@
           <p:cNvPr id="6" name="スライド番号プレースホルダー 5">
             <a:extLst>
               <a:ext uri="{FF2B5EF4-FFF2-40B4-BE49-F238E27FC236}">
-                <a16:creationId xmlns:a16="http://schemas.microsoft.com/office/drawing/2014/main" id="{EE32A015-52E4-0731-8E16-C6083692BFAE}"/>
+                <a16:creationId xmlns:a16="http://schemas.microsoft.com/office/drawing/2014/main" id="{956B0C42-7109-6F65-5E4F-12B5F49CEF47}"/>
               </a:ext>
             </a:extLst>
           </p:cNvPr>
@@ -3280,7 +3280,7 @@
             </a:lvl1pPr>
           </a:lstStyle>
           <a:p>
-            <a:fld id="{18992577-D21F-4C21-AD58-BA56B223B010}" type="slidenum">
+            <a:fld id="{789A5AE6-38FD-4285-82C1-7D570708A39C}" type="slidenum">
               <a:rPr kumimoji="1" lang="ja-JP" altLang="en-US" smtClean="0"/>
               <a:t>‹#›</a:t>
             </a:fld>
@@ -3291,7 +3291,7 @@
     </p:spTree>
     <p:extLst>
       <p:ext uri="{BB962C8B-B14F-4D97-AF65-F5344CB8AC3E}">
-        <p14:creationId xmlns:p14="http://schemas.microsoft.com/office/powerpoint/2010/main" val="874067537"/>
+        <p14:creationId xmlns:p14="http://schemas.microsoft.com/office/powerpoint/2010/main" val="1725710662"/>
       </p:ext>
     </p:extLst>
   </p:cSld>
@@ -3614,7 +3614,7 @@
           <p:cNvPr id="2" name="タイトル 1">
             <a:extLst>
               <a:ext uri="{FF2B5EF4-FFF2-40B4-BE49-F238E27FC236}">
-                <a16:creationId xmlns:a16="http://schemas.microsoft.com/office/drawing/2014/main" id="{5C953BB0-F787-3C8D-77E3-68493953CB54}"/>
+                <a16:creationId xmlns:a16="http://schemas.microsoft.com/office/drawing/2014/main" id="{B5F05BEA-F847-816F-F8CD-56528B7285DF}"/>
               </a:ext>
             </a:extLst>
           </p:cNvPr>
@@ -3643,7 +3643,7 @@
           <p:cNvPr id="3" name="字幕 2">
             <a:extLst>
               <a:ext uri="{FF2B5EF4-FFF2-40B4-BE49-F238E27FC236}">
-                <a16:creationId xmlns:a16="http://schemas.microsoft.com/office/drawing/2014/main" id="{E0C195A3-75A0-5A81-4543-315C623097E1}"/>
+                <a16:creationId xmlns:a16="http://schemas.microsoft.com/office/drawing/2014/main" id="{5C5A4923-57D9-6088-2289-F789E9489057}"/>
               </a:ext>
             </a:extLst>
           </p:cNvPr>
@@ -3677,7 +3677,7 @@
     </p:spTree>
     <p:extLst>
       <p:ext uri="{BB962C8B-B14F-4D97-AF65-F5344CB8AC3E}">
-        <p14:creationId xmlns:p14="http://schemas.microsoft.com/office/powerpoint/2010/main" val="1079130797"/>
+        <p14:creationId xmlns:p14="http://schemas.microsoft.com/office/powerpoint/2010/main" val="2572846799"/>
       </p:ext>
     </p:extLst>
   </p:cSld>
